--- a/docs/eec-app-ontwikkeling.pptx
+++ b/docs/eec-app-ontwikkeling.pptx
@@ -6038,7 +6038,7 @@
             <a:avLst/>
           </a:prstGeom>
           <a:solidFill>
-            <a:srgbClr val="D28A15"/>
+            <a:srgbClr val="2E8B57"/>
           </a:solidFill>
           <a:ln w="6350">
             <a:solidFill>
@@ -6085,7 +6085,7 @@
                 <a:ea typeface="Aptos" pitchFamily="34" charset="-122"/>
                 <a:cs typeface="Aptos" pitchFamily="34" charset="-120"/>
               </a:rPr>
-              <a:t>Scenario - nu is compact: overzicht, plan, uitvoerbaarheid en waarde.</a:t>
+              <a:t>Grafiek-generators vermijden variabelebotsingen in ApexCharts.</a:t>
             </a:r>
             <a:endParaRPr lang="en-US" sz="1800" dirty="0"/>
           </a:p>
@@ -6106,7 +6106,7 @@
             <a:avLst/>
           </a:prstGeom>
           <a:solidFill>
-            <a:srgbClr val="D28A15"/>
+            <a:srgbClr val="2E8B57"/>
           </a:solidFill>
           <a:ln w="6350">
             <a:solidFill>
@@ -6153,7 +6153,7 @@
                 <a:ea typeface="Aptos" pitchFamily="34" charset="-122"/>
                 <a:cs typeface="Aptos" pitchFamily="34" charset="-120"/>
               </a:rPr>
-              <a:t>Scenario-details bundelen actie, reden, vermogen en EUR-effect.</a:t>
+              <a:t>Controle toont YAML-versie om oude Lovelace-imports te herkennen.</a:t>
             </a:r>
             <a:endParaRPr lang="en-US" sz="1800" dirty="0"/>
           </a:p>
@@ -6174,7 +6174,7 @@
             <a:avLst/>
           </a:prstGeom>
           <a:solidFill>
-            <a:srgbClr val="1B68B3"/>
+            <a:srgbClr val="2E8B57"/>
           </a:solidFill>
           <a:ln w="6350">
             <a:solidFill>
@@ -6221,7 +6221,7 @@
                 <a:ea typeface="Aptos" pitchFamily="34" charset="-122"/>
                 <a:cs typeface="Aptos" pitchFamily="34" charset="-120"/>
               </a:rPr>
-              <a:t>Eerst bewijs en datacheck; Scenario hulp blijft naslag.</a:t>
+              <a:t>De dashboard-YAML begint met dezelfde versie als de integratie.</a:t>
             </a:r>
             <a:endParaRPr lang="en-US" sz="1800" dirty="0"/>
           </a:p>
@@ -6242,7 +6242,7 @@
             <a:avLst/>
           </a:prstGeom>
           <a:solidFill>
-            <a:srgbClr val="1B68B3"/>
+            <a:srgbClr val="2E8B57"/>
           </a:solidFill>
           <a:ln w="6350">
             <a:solidFill>
@@ -6289,7 +6289,7 @@
                 <a:ea typeface="Aptos" pitchFamily="34" charset="-122"/>
                 <a:cs typeface="Aptos" pitchFamily="34" charset="-120"/>
               </a:rPr>
-              <a:t>Waarom verklaart start, automodus, context en uitvoerplan.</a:t>
+              <a:t>De YAML-tegel heeft een document-check-icoon en expliciete marker.</a:t>
             </a:r>
             <a:endParaRPr lang="en-US" sz="1800" dirty="0"/>
           </a:p>
@@ -6310,7 +6310,7 @@
             <a:avLst/>
           </a:prstGeom>
           <a:solidFill>
-            <a:srgbClr val="C2473B"/>
+            <a:srgbClr val="2E8B57"/>
           </a:solidFill>
           <a:ln w="6350">
             <a:solidFill>
@@ -6331,6 +6331,754 @@
         <p:spPr>
           <a:xfrm>
             <a:off x="1200150" y="13963650"/>
+            <a:ext cx="8858250" cy="457200"/>
+          </a:xfrm>
+          <a:prstGeom prst="rect">
+            <a:avLst/>
+          </a:prstGeom>
+          <a:noFill/>
+          <a:ln/>
+        </p:spPr>
+        <p:txBody>
+          <a:bodyPr wrap="square" lIns="0" tIns="0" rIns="0" bIns="0" rtlCol="0" anchor="ctr">
+            <a:normAutofit/>
+          </a:bodyPr>
+          <a:lstStyle/>
+          <a:p>
+            <a:pPr indent="0" marL="0">
+              <a:buNone/>
+            </a:pPr>
+            <a:r>
+              <a:rPr lang="en-US" sz="1800" dirty="0">
+                <a:solidFill>
+                  <a:srgbClr val="17202A"/>
+                </a:solidFill>
+                <a:latin typeface="Aptos" pitchFamily="34" charset="0"/>
+                <a:ea typeface="Aptos" pitchFamily="34" charset="-122"/>
+                <a:cs typeface="Aptos" pitchFamily="34" charset="-120"/>
+              </a:rPr>
+              <a:t>Manifest-links wijzen naar dezelfde GitHub-bron als HACS.</a:t>
+            </a:r>
+            <a:endParaRPr lang="en-US" sz="1800" dirty="0"/>
+          </a:p>
+        </p:txBody>
+      </p:sp>
+      <p:sp>
+        <p:nvSpPr>
+          <p:cNvPr id="48" name="Shape 46"/>
+          <p:cNvSpPr/>
+          <p:nvPr/>
+        </p:nvSpPr>
+        <p:spPr>
+          <a:xfrm>
+            <a:off x="914400" y="14649450"/>
+            <a:ext cx="133350" cy="133350"/>
+          </a:xfrm>
+          <a:prstGeom prst="rect">
+            <a:avLst/>
+          </a:prstGeom>
+          <a:solidFill>
+            <a:srgbClr val="2E8B57"/>
+          </a:solidFill>
+          <a:ln w="6350">
+            <a:solidFill>
+              <a:srgbClr val="FFFFFF">
+                <a:alpha val="0"/>
+              </a:srgbClr>
+            </a:solidFill>
+            <a:prstDash val="solid"/>
+          </a:ln>
+        </p:spPr>
+      </p:sp>
+      <p:sp>
+        <p:nvSpPr>
+          <p:cNvPr id="49" name="Text 47"/>
+          <p:cNvSpPr/>
+          <p:nvPr/>
+        </p:nvSpPr>
+        <p:spPr>
+          <a:xfrm>
+            <a:off x="1200150" y="14554200"/>
+            <a:ext cx="8858250" cy="457200"/>
+          </a:xfrm>
+          <a:prstGeom prst="rect">
+            <a:avLst/>
+          </a:prstGeom>
+          <a:noFill/>
+          <a:ln/>
+        </p:spPr>
+        <p:txBody>
+          <a:bodyPr wrap="square" lIns="0" tIns="0" rIns="0" bIns="0" rtlCol="0" anchor="ctr">
+            <a:normAutofit/>
+          </a:bodyPr>
+          <a:lstStyle/>
+          <a:p>
+            <a:pPr indent="0" marL="0">
+              <a:buNone/>
+            </a:pPr>
+            <a:r>
+              <a:rPr lang="en-US" sz="1800" dirty="0">
+                <a:solidFill>
+                  <a:srgbClr val="17202A"/>
+                </a:solidFill>
+                <a:latin typeface="Aptos" pitchFamily="34" charset="0"/>
+                <a:ea typeface="Aptos" pitchFamily="34" charset="-122"/>
+                <a:cs typeface="Aptos" pitchFamily="34" charset="-120"/>
+              </a:rPr>
+              <a:t>Releasecheck bewijst lokaal welke versie HA moet tonen.</a:t>
+            </a:r>
+            <a:endParaRPr lang="en-US" sz="1800" dirty="0"/>
+          </a:p>
+        </p:txBody>
+      </p:sp>
+      <p:sp>
+        <p:nvSpPr>
+          <p:cNvPr id="50" name="Shape 48"/>
+          <p:cNvSpPr/>
+          <p:nvPr/>
+        </p:nvSpPr>
+        <p:spPr>
+          <a:xfrm>
+            <a:off x="914400" y="15240000"/>
+            <a:ext cx="133350" cy="133350"/>
+          </a:xfrm>
+          <a:prstGeom prst="rect">
+            <a:avLst/>
+          </a:prstGeom>
+          <a:solidFill>
+            <a:srgbClr val="2E8B57"/>
+          </a:solidFill>
+          <a:ln w="6350">
+            <a:solidFill>
+              <a:srgbClr val="FFFFFF">
+                <a:alpha val="0"/>
+              </a:srgbClr>
+            </a:solidFill>
+            <a:prstDash val="solid"/>
+          </a:ln>
+        </p:spPr>
+      </p:sp>
+      <p:sp>
+        <p:nvSpPr>
+          <p:cNvPr id="51" name="Text 49"/>
+          <p:cNvSpPr/>
+          <p:nvPr/>
+        </p:nvSpPr>
+        <p:spPr>
+          <a:xfrm>
+            <a:off x="1200150" y="15144750"/>
+            <a:ext cx="8858250" cy="457200"/>
+          </a:xfrm>
+          <a:prstGeom prst="rect">
+            <a:avLst/>
+          </a:prstGeom>
+          <a:noFill/>
+          <a:ln/>
+        </p:spPr>
+        <p:txBody>
+          <a:bodyPr wrap="square" lIns="0" tIns="0" rIns="0" bIns="0" rtlCol="0" anchor="ctr">
+            <a:normAutofit/>
+          </a:bodyPr>
+          <a:lstStyle/>
+          <a:p>
+            <a:pPr indent="0" marL="0">
+              <a:buNone/>
+            </a:pPr>
+            <a:r>
+              <a:rPr lang="en-US" sz="1800" dirty="0">
+                <a:solidFill>
+                  <a:srgbClr val="17202A"/>
+                </a:solidFill>
+                <a:latin typeface="Aptos" pitchFamily="34" charset="0"/>
+                <a:ea typeface="Aptos" pitchFamily="34" charset="-122"/>
+                <a:cs typeface="Aptos" pitchFamily="34" charset="-120"/>
+              </a:rPr>
+              <a:t>Een schoon zip-pakket maakt handmatige GitHub-upload haalbaar.</a:t>
+            </a:r>
+            <a:endParaRPr lang="en-US" sz="1800" dirty="0"/>
+          </a:p>
+        </p:txBody>
+      </p:sp>
+      <p:sp>
+        <p:nvSpPr>
+          <p:cNvPr id="52" name="Shape 50"/>
+          <p:cNvSpPr/>
+          <p:nvPr/>
+        </p:nvSpPr>
+        <p:spPr>
+          <a:xfrm>
+            <a:off x="914400" y="15830550"/>
+            <a:ext cx="133350" cy="133350"/>
+          </a:xfrm>
+          <a:prstGeom prst="rect">
+            <a:avLst/>
+          </a:prstGeom>
+          <a:solidFill>
+            <a:srgbClr val="2E8B57"/>
+          </a:solidFill>
+          <a:ln w="6350">
+            <a:solidFill>
+              <a:srgbClr val="FFFFFF">
+                <a:alpha val="0"/>
+              </a:srgbClr>
+            </a:solidFill>
+            <a:prstDash val="solid"/>
+          </a:ln>
+        </p:spPr>
+      </p:sp>
+      <p:sp>
+        <p:nvSpPr>
+          <p:cNvPr id="53" name="Text 51"/>
+          <p:cNvSpPr/>
+          <p:nvPr/>
+        </p:nvSpPr>
+        <p:spPr>
+          <a:xfrm>
+            <a:off x="1200150" y="15735300"/>
+            <a:ext cx="8858250" cy="457200"/>
+          </a:xfrm>
+          <a:prstGeom prst="rect">
+            <a:avLst/>
+          </a:prstGeom>
+          <a:noFill/>
+          <a:ln/>
+        </p:spPr>
+        <p:txBody>
+          <a:bodyPr wrap="square" lIns="0" tIns="0" rIns="0" bIns="0" rtlCol="0" anchor="ctr">
+            <a:normAutofit/>
+          </a:bodyPr>
+          <a:lstStyle/>
+          <a:p>
+            <a:pPr indent="0" marL="0">
+              <a:buNone/>
+            </a:pPr>
+            <a:r>
+              <a:rPr lang="en-US" sz="1800" dirty="0">
+                <a:solidFill>
+                  <a:srgbClr val="17202A"/>
+                </a:solidFill>
+                <a:latin typeface="Aptos" pitchFamily="34" charset="0"/>
+                <a:ea typeface="Aptos" pitchFamily="34" charset="-122"/>
+                <a:cs typeface="Aptos" pitchFamily="34" charset="-120"/>
+              </a:rPr>
+              <a:t>Het uploadpakket bevat ook tests als verificatiecontract.</a:t>
+            </a:r>
+            <a:endParaRPr lang="en-US" sz="1800" dirty="0"/>
+          </a:p>
+        </p:txBody>
+      </p:sp>
+      <p:sp>
+        <p:nvSpPr>
+          <p:cNvPr id="54" name="Shape 52"/>
+          <p:cNvSpPr/>
+          <p:nvPr/>
+        </p:nvSpPr>
+        <p:spPr>
+          <a:xfrm>
+            <a:off x="914400" y="16421100"/>
+            <a:ext cx="133350" cy="133350"/>
+          </a:xfrm>
+          <a:prstGeom prst="rect">
+            <a:avLst/>
+          </a:prstGeom>
+          <a:solidFill>
+            <a:srgbClr val="2E8B57"/>
+          </a:solidFill>
+          <a:ln w="6350">
+            <a:solidFill>
+              <a:srgbClr val="FFFFFF">
+                <a:alpha val="0"/>
+              </a:srgbClr>
+            </a:solidFill>
+            <a:prstDash val="solid"/>
+          </a:ln>
+        </p:spPr>
+      </p:sp>
+      <p:sp>
+        <p:nvSpPr>
+          <p:cNvPr id="55" name="Text 53"/>
+          <p:cNvSpPr/>
+          <p:nvPr/>
+        </p:nvSpPr>
+        <p:spPr>
+          <a:xfrm>
+            <a:off x="1200150" y="16325850"/>
+            <a:ext cx="8858250" cy="457200"/>
+          </a:xfrm>
+          <a:prstGeom prst="rect">
+            <a:avLst/>
+          </a:prstGeom>
+          <a:noFill/>
+          <a:ln/>
+        </p:spPr>
+        <p:txBody>
+          <a:bodyPr wrap="square" lIns="0" tIns="0" rIns="0" bIns="0" rtlCol="0" anchor="ctr">
+            <a:normAutofit/>
+          </a:bodyPr>
+          <a:lstStyle/>
+          <a:p>
+            <a:pPr indent="0" marL="0">
+              <a:buNone/>
+            </a:pPr>
+            <a:r>
+              <a:rPr lang="en-US" sz="1800" dirty="0">
+                <a:solidFill>
+                  <a:srgbClr val="17202A"/>
+                </a:solidFill>
+                <a:latin typeface="Aptos" pitchFamily="34" charset="0"/>
+                <a:ea typeface="Aptos" pitchFamily="34" charset="-122"/>
+                <a:cs typeface="Aptos" pitchFamily="34" charset="-120"/>
+              </a:rPr>
+              <a:t>Release-manifest legt checksums per pakketbestand vast.</a:t>
+            </a:r>
+            <a:endParaRPr lang="en-US" sz="1800" dirty="0"/>
+          </a:p>
+        </p:txBody>
+      </p:sp>
+      <p:sp>
+        <p:nvSpPr>
+          <p:cNvPr id="56" name="Shape 54"/>
+          <p:cNvSpPr/>
+          <p:nvPr/>
+        </p:nvSpPr>
+        <p:spPr>
+          <a:xfrm>
+            <a:off x="914400" y="17011650"/>
+            <a:ext cx="133350" cy="133350"/>
+          </a:xfrm>
+          <a:prstGeom prst="rect">
+            <a:avLst/>
+          </a:prstGeom>
+          <a:solidFill>
+            <a:srgbClr val="2E8B57"/>
+          </a:solidFill>
+          <a:ln w="6350">
+            <a:solidFill>
+              <a:srgbClr val="FFFFFF">
+                <a:alpha val="0"/>
+              </a:srgbClr>
+            </a:solidFill>
+            <a:prstDash val="solid"/>
+          </a:ln>
+        </p:spPr>
+      </p:sp>
+      <p:sp>
+        <p:nvSpPr>
+          <p:cNvPr id="57" name="Text 55"/>
+          <p:cNvSpPr/>
+          <p:nvPr/>
+        </p:nvSpPr>
+        <p:spPr>
+          <a:xfrm>
+            <a:off x="1200150" y="16916400"/>
+            <a:ext cx="8858250" cy="457200"/>
+          </a:xfrm>
+          <a:prstGeom prst="rect">
+            <a:avLst/>
+          </a:prstGeom>
+          <a:noFill/>
+          <a:ln/>
+        </p:spPr>
+        <p:txBody>
+          <a:bodyPr wrap="square" lIns="0" tIns="0" rIns="0" bIns="0" rtlCol="0" anchor="ctr">
+            <a:normAutofit/>
+          </a:bodyPr>
+          <a:lstStyle/>
+          <a:p>
+            <a:pPr indent="0" marL="0">
+              <a:buNone/>
+            </a:pPr>
+            <a:r>
+              <a:rPr lang="en-US" sz="1800" dirty="0">
+                <a:solidFill>
+                  <a:srgbClr val="17202A"/>
+                </a:solidFill>
+                <a:latin typeface="Aptos" pitchFamily="34" charset="0"/>
+                <a:ea typeface="Aptos" pitchFamily="34" charset="-122"/>
+                <a:cs typeface="Aptos" pitchFamily="34" charset="-120"/>
+              </a:rPr>
+              <a:t>Dashboardtests blokkeren oude labels en dubbele kerntegels.</a:t>
+            </a:r>
+            <a:endParaRPr lang="en-US" sz="1800" dirty="0"/>
+          </a:p>
+        </p:txBody>
+      </p:sp>
+      <p:sp>
+        <p:nvSpPr>
+          <p:cNvPr id="58" name="Shape 56"/>
+          <p:cNvSpPr/>
+          <p:nvPr/>
+        </p:nvSpPr>
+        <p:spPr>
+          <a:xfrm>
+            <a:off x="914400" y="17602200"/>
+            <a:ext cx="133350" cy="133350"/>
+          </a:xfrm>
+          <a:prstGeom prst="rect">
+            <a:avLst/>
+          </a:prstGeom>
+          <a:solidFill>
+            <a:srgbClr val="2E8B57"/>
+          </a:solidFill>
+          <a:ln w="6350">
+            <a:solidFill>
+              <a:srgbClr val="FFFFFF">
+                <a:alpha val="0"/>
+              </a:srgbClr>
+            </a:solidFill>
+            <a:prstDash val="solid"/>
+          </a:ln>
+        </p:spPr>
+      </p:sp>
+      <p:sp>
+        <p:nvSpPr>
+          <p:cNvPr id="59" name="Text 57"/>
+          <p:cNvSpPr/>
+          <p:nvPr/>
+        </p:nvSpPr>
+        <p:spPr>
+          <a:xfrm>
+            <a:off x="1200150" y="17506950"/>
+            <a:ext cx="8858250" cy="457200"/>
+          </a:xfrm>
+          <a:prstGeom prst="rect">
+            <a:avLst/>
+          </a:prstGeom>
+          <a:noFill/>
+          <a:ln/>
+        </p:spPr>
+        <p:txBody>
+          <a:bodyPr wrap="square" lIns="0" tIns="0" rIns="0" bIns="0" rtlCol="0" anchor="ctr">
+            <a:normAutofit/>
+          </a:bodyPr>
+          <a:lstStyle/>
+          <a:p>
+            <a:pPr indent="0" marL="0">
+              <a:buNone/>
+            </a:pPr>
+            <a:r>
+              <a:rPr lang="en-US" sz="1800" dirty="0">
+                <a:solidFill>
+                  <a:srgbClr val="17202A"/>
+                </a:solidFill>
+                <a:latin typeface="Aptos" pitchFamily="34" charset="0"/>
+                <a:ea typeface="Aptos" pitchFamily="34" charset="-122"/>
+                <a:cs typeface="Aptos" pitchFamily="34" charset="-120"/>
+              </a:rPr>
+              <a:t>De Versie-sensor toont ook de verwachte dashboard-YAML.</a:t>
+            </a:r>
+            <a:endParaRPr lang="en-US" sz="1800" dirty="0"/>
+          </a:p>
+        </p:txBody>
+      </p:sp>
+      <p:sp>
+        <p:nvSpPr>
+          <p:cNvPr id="60" name="Shape 58"/>
+          <p:cNvSpPr/>
+          <p:nvPr/>
+        </p:nvSpPr>
+        <p:spPr>
+          <a:xfrm>
+            <a:off x="914400" y="18192750"/>
+            <a:ext cx="133350" cy="133350"/>
+          </a:xfrm>
+          <a:prstGeom prst="rect">
+            <a:avLst/>
+          </a:prstGeom>
+          <a:solidFill>
+            <a:srgbClr val="D28A15"/>
+          </a:solidFill>
+          <a:ln w="6350">
+            <a:solidFill>
+              <a:srgbClr val="FFFFFF">
+                <a:alpha val="0"/>
+              </a:srgbClr>
+            </a:solidFill>
+            <a:prstDash val="solid"/>
+          </a:ln>
+        </p:spPr>
+      </p:sp>
+      <p:sp>
+        <p:nvSpPr>
+          <p:cNvPr id="61" name="Text 59"/>
+          <p:cNvSpPr/>
+          <p:nvPr/>
+        </p:nvSpPr>
+        <p:spPr>
+          <a:xfrm>
+            <a:off x="1200150" y="18097500"/>
+            <a:ext cx="8858250" cy="457200"/>
+          </a:xfrm>
+          <a:prstGeom prst="rect">
+            <a:avLst/>
+          </a:prstGeom>
+          <a:noFill/>
+          <a:ln/>
+        </p:spPr>
+        <p:txBody>
+          <a:bodyPr wrap="square" lIns="0" tIns="0" rIns="0" bIns="0" rtlCol="0" anchor="ctr">
+            <a:normAutofit/>
+          </a:bodyPr>
+          <a:lstStyle/>
+          <a:p>
+            <a:pPr indent="0" marL="0">
+              <a:buNone/>
+            </a:pPr>
+            <a:r>
+              <a:rPr lang="en-US" sz="1800" dirty="0">
+                <a:solidFill>
+                  <a:srgbClr val="17202A"/>
+                </a:solidFill>
+                <a:latin typeface="Aptos" pitchFamily="34" charset="0"/>
+                <a:ea typeface="Aptos" pitchFamily="34" charset="-122"/>
+                <a:cs typeface="Aptos" pitchFamily="34" charset="-120"/>
+              </a:rPr>
+              <a:t>Scenario - nu is compact: overzicht, plan, uitvoerbaarheid en waarde.</a:t>
+            </a:r>
+            <a:endParaRPr lang="en-US" sz="1800" dirty="0"/>
+          </a:p>
+        </p:txBody>
+      </p:sp>
+      <p:sp>
+        <p:nvSpPr>
+          <p:cNvPr id="62" name="Shape 60"/>
+          <p:cNvSpPr/>
+          <p:nvPr/>
+        </p:nvSpPr>
+        <p:spPr>
+          <a:xfrm>
+            <a:off x="914400" y="18783300"/>
+            <a:ext cx="133350" cy="133350"/>
+          </a:xfrm>
+          <a:prstGeom prst="rect">
+            <a:avLst/>
+          </a:prstGeom>
+          <a:solidFill>
+            <a:srgbClr val="D28A15"/>
+          </a:solidFill>
+          <a:ln w="6350">
+            <a:solidFill>
+              <a:srgbClr val="FFFFFF">
+                <a:alpha val="0"/>
+              </a:srgbClr>
+            </a:solidFill>
+            <a:prstDash val="solid"/>
+          </a:ln>
+        </p:spPr>
+      </p:sp>
+      <p:sp>
+        <p:nvSpPr>
+          <p:cNvPr id="63" name="Text 61"/>
+          <p:cNvSpPr/>
+          <p:nvPr/>
+        </p:nvSpPr>
+        <p:spPr>
+          <a:xfrm>
+            <a:off x="1200150" y="18688050"/>
+            <a:ext cx="8858250" cy="457200"/>
+          </a:xfrm>
+          <a:prstGeom prst="rect">
+            <a:avLst/>
+          </a:prstGeom>
+          <a:noFill/>
+          <a:ln/>
+        </p:spPr>
+        <p:txBody>
+          <a:bodyPr wrap="square" lIns="0" tIns="0" rIns="0" bIns="0" rtlCol="0" anchor="ctr">
+            <a:normAutofit/>
+          </a:bodyPr>
+          <a:lstStyle/>
+          <a:p>
+            <a:pPr indent="0" marL="0">
+              <a:buNone/>
+            </a:pPr>
+            <a:r>
+              <a:rPr lang="en-US" sz="1800" dirty="0">
+                <a:solidFill>
+                  <a:srgbClr val="17202A"/>
+                </a:solidFill>
+                <a:latin typeface="Aptos" pitchFamily="34" charset="0"/>
+                <a:ea typeface="Aptos" pitchFamily="34" charset="-122"/>
+                <a:cs typeface="Aptos" pitchFamily="34" charset="-120"/>
+              </a:rPr>
+              <a:t>Scenario-details bundelen actie, reden, vermogen en EUR-effect.</a:t>
+            </a:r>
+            <a:endParaRPr lang="en-US" sz="1800" dirty="0"/>
+          </a:p>
+        </p:txBody>
+      </p:sp>
+      <p:sp>
+        <p:nvSpPr>
+          <p:cNvPr id="64" name="Shape 62"/>
+          <p:cNvSpPr/>
+          <p:nvPr/>
+        </p:nvSpPr>
+        <p:spPr>
+          <a:xfrm>
+            <a:off x="914400" y="19373850"/>
+            <a:ext cx="133350" cy="133350"/>
+          </a:xfrm>
+          <a:prstGeom prst="rect">
+            <a:avLst/>
+          </a:prstGeom>
+          <a:solidFill>
+            <a:srgbClr val="1B68B3"/>
+          </a:solidFill>
+          <a:ln w="6350">
+            <a:solidFill>
+              <a:srgbClr val="FFFFFF">
+                <a:alpha val="0"/>
+              </a:srgbClr>
+            </a:solidFill>
+            <a:prstDash val="solid"/>
+          </a:ln>
+        </p:spPr>
+      </p:sp>
+      <p:sp>
+        <p:nvSpPr>
+          <p:cNvPr id="65" name="Text 63"/>
+          <p:cNvSpPr/>
+          <p:nvPr/>
+        </p:nvSpPr>
+        <p:spPr>
+          <a:xfrm>
+            <a:off x="1200150" y="19278600"/>
+            <a:ext cx="8858250" cy="457200"/>
+          </a:xfrm>
+          <a:prstGeom prst="rect">
+            <a:avLst/>
+          </a:prstGeom>
+          <a:noFill/>
+          <a:ln/>
+        </p:spPr>
+        <p:txBody>
+          <a:bodyPr wrap="square" lIns="0" tIns="0" rIns="0" bIns="0" rtlCol="0" anchor="ctr">
+            <a:normAutofit/>
+          </a:bodyPr>
+          <a:lstStyle/>
+          <a:p>
+            <a:pPr indent="0" marL="0">
+              <a:buNone/>
+            </a:pPr>
+            <a:r>
+              <a:rPr lang="en-US" sz="1800" dirty="0">
+                <a:solidFill>
+                  <a:srgbClr val="17202A"/>
+                </a:solidFill>
+                <a:latin typeface="Aptos" pitchFamily="34" charset="0"/>
+                <a:ea typeface="Aptos" pitchFamily="34" charset="-122"/>
+                <a:cs typeface="Aptos" pitchFamily="34" charset="-120"/>
+              </a:rPr>
+              <a:t>Eerst bewijs en datacheck; Scenario hulp blijft naslag.</a:t>
+            </a:r>
+            <a:endParaRPr lang="en-US" sz="1800" dirty="0"/>
+          </a:p>
+        </p:txBody>
+      </p:sp>
+      <p:sp>
+        <p:nvSpPr>
+          <p:cNvPr id="66" name="Shape 64"/>
+          <p:cNvSpPr/>
+          <p:nvPr/>
+        </p:nvSpPr>
+        <p:spPr>
+          <a:xfrm>
+            <a:off x="914400" y="19964400"/>
+            <a:ext cx="133350" cy="133350"/>
+          </a:xfrm>
+          <a:prstGeom prst="rect">
+            <a:avLst/>
+          </a:prstGeom>
+          <a:solidFill>
+            <a:srgbClr val="1B68B3"/>
+          </a:solidFill>
+          <a:ln w="6350">
+            <a:solidFill>
+              <a:srgbClr val="FFFFFF">
+                <a:alpha val="0"/>
+              </a:srgbClr>
+            </a:solidFill>
+            <a:prstDash val="solid"/>
+          </a:ln>
+        </p:spPr>
+      </p:sp>
+      <p:sp>
+        <p:nvSpPr>
+          <p:cNvPr id="67" name="Text 65"/>
+          <p:cNvSpPr/>
+          <p:nvPr/>
+        </p:nvSpPr>
+        <p:spPr>
+          <a:xfrm>
+            <a:off x="1200150" y="19869150"/>
+            <a:ext cx="8858250" cy="457200"/>
+          </a:xfrm>
+          <a:prstGeom prst="rect">
+            <a:avLst/>
+          </a:prstGeom>
+          <a:noFill/>
+          <a:ln/>
+        </p:spPr>
+        <p:txBody>
+          <a:bodyPr wrap="square" lIns="0" tIns="0" rIns="0" bIns="0" rtlCol="0" anchor="ctr">
+            <a:normAutofit/>
+          </a:bodyPr>
+          <a:lstStyle/>
+          <a:p>
+            <a:pPr indent="0" marL="0">
+              <a:buNone/>
+            </a:pPr>
+            <a:r>
+              <a:rPr lang="en-US" sz="1800" dirty="0">
+                <a:solidFill>
+                  <a:srgbClr val="17202A"/>
+                </a:solidFill>
+                <a:latin typeface="Aptos" pitchFamily="34" charset="0"/>
+                <a:ea typeface="Aptos" pitchFamily="34" charset="-122"/>
+                <a:cs typeface="Aptos" pitchFamily="34" charset="-120"/>
+              </a:rPr>
+              <a:t>Waarom verklaart start, automodus, context en uitvoerplan.</a:t>
+            </a:r>
+            <a:endParaRPr lang="en-US" sz="1800" dirty="0"/>
+          </a:p>
+        </p:txBody>
+      </p:sp>
+      <p:sp>
+        <p:nvSpPr>
+          <p:cNvPr id="68" name="Shape 66"/>
+          <p:cNvSpPr/>
+          <p:nvPr/>
+        </p:nvSpPr>
+        <p:spPr>
+          <a:xfrm>
+            <a:off x="914400" y="20554950"/>
+            <a:ext cx="133350" cy="133350"/>
+          </a:xfrm>
+          <a:prstGeom prst="rect">
+            <a:avLst/>
+          </a:prstGeom>
+          <a:solidFill>
+            <a:srgbClr val="C2473B"/>
+          </a:solidFill>
+          <a:ln w="6350">
+            <a:solidFill>
+              <a:srgbClr val="FFFFFF">
+                <a:alpha val="0"/>
+              </a:srgbClr>
+            </a:solidFill>
+            <a:prstDash val="solid"/>
+          </a:ln>
+        </p:spPr>
+      </p:sp>
+      <p:sp>
+        <p:nvSpPr>
+          <p:cNvPr id="69" name="Text 67"/>
+          <p:cNvSpPr/>
+          <p:nvPr/>
+        </p:nvSpPr>
+        <p:spPr>
+          <a:xfrm>
+            <a:off x="1200150" y="20459700"/>
             <a:ext cx="8858250" cy="457200"/>
           </a:xfrm>
           <a:prstGeom prst="rect">
